--- a/docs/content/t_tests/t_tests_lecture.pptx
+++ b/docs/content/t_tests/t_tests_lecture.pptx
@@ -3338,7 +3338,7 @@
             </a:pPr>
             <a:r>
               <a:rPr/>
-              <a:t>T-Tests: One, Two, Paired</a:t>
+              <a:t>Lecture: T-Tests: One, Two, Paired</a:t>
             </a:r>
           </a:p>
         </p:txBody>
@@ -5870,7 +5870,43 @@
                 </a:solidFill>
                 <a:latin typeface="Courier"/>
               </a:rPr>
-              <a:t>()</a:t>
+              <a:t>(</a:t>
+            </a:r>
+            <a:r>
+              <a:rPr>
+                <a:solidFill>
+                  <a:srgbClr val="657422"/>
+                </a:solidFill>
+                <a:latin typeface="Courier"/>
+              </a:rPr>
+              <a:t>base_size =</a:t>
+            </a:r>
+            <a:r>
+              <a:rPr>
+                <a:solidFill>
+                  <a:srgbClr val="003B4F"/>
+                </a:solidFill>
+                <a:latin typeface="Courier"/>
+              </a:rPr>
+              <a:t> </a:t>
+            </a:r>
+            <a:r>
+              <a:rPr>
+                <a:solidFill>
+                  <a:srgbClr val="AD0000"/>
+                </a:solidFill>
+                <a:latin typeface="Courier"/>
+              </a:rPr>
+              <a:t>9</a:t>
+            </a:r>
+            <a:r>
+              <a:rPr>
+                <a:solidFill>
+                  <a:srgbClr val="003B4F"/>
+                </a:solidFill>
+                <a:latin typeface="Courier"/>
+              </a:rPr>
+              <a:t>)</a:t>
             </a:r>
             <a:br/>
             <a:r>
@@ -8988,7 +9024,43 @@
                 </a:solidFill>
                 <a:latin typeface="Courier"/>
               </a:rPr>
-              <a:t>()</a:t>
+              <a:t>(</a:t>
+            </a:r>
+            <a:r>
+              <a:rPr>
+                <a:solidFill>
+                  <a:srgbClr val="657422"/>
+                </a:solidFill>
+                <a:latin typeface="Courier"/>
+              </a:rPr>
+              <a:t>base_size =</a:t>
+            </a:r>
+            <a:r>
+              <a:rPr>
+                <a:solidFill>
+                  <a:srgbClr val="003B4F"/>
+                </a:solidFill>
+                <a:latin typeface="Courier"/>
+              </a:rPr>
+              <a:t> </a:t>
+            </a:r>
+            <a:r>
+              <a:rPr>
+                <a:solidFill>
+                  <a:srgbClr val="AD0000"/>
+                </a:solidFill>
+                <a:latin typeface="Courier"/>
+              </a:rPr>
+              <a:t>9</a:t>
+            </a:r>
+            <a:r>
+              <a:rPr>
+                <a:solidFill>
+                  <a:srgbClr val="003B4F"/>
+                </a:solidFill>
+                <a:latin typeface="Courier"/>
+              </a:rPr>
+              <a:t>)</a:t>
             </a:r>
             <a:br/>
             <a:r>
@@ -14414,7 +14486,43 @@
                 </a:solidFill>
                 <a:latin typeface="Courier"/>
               </a:rPr>
-              <a:t>() </a:t>
+              <a:t>(</a:t>
+            </a:r>
+            <a:r>
+              <a:rPr>
+                <a:solidFill>
+                  <a:srgbClr val="657422"/>
+                </a:solidFill>
+                <a:latin typeface="Courier"/>
+              </a:rPr>
+              <a:t>base_size =</a:t>
+            </a:r>
+            <a:r>
+              <a:rPr>
+                <a:solidFill>
+                  <a:srgbClr val="003B4F"/>
+                </a:solidFill>
+                <a:latin typeface="Courier"/>
+              </a:rPr>
+              <a:t> </a:t>
+            </a:r>
+            <a:r>
+              <a:rPr>
+                <a:solidFill>
+                  <a:srgbClr val="AD0000"/>
+                </a:solidFill>
+                <a:latin typeface="Courier"/>
+              </a:rPr>
+              <a:t>9</a:t>
+            </a:r>
+            <a:r>
+              <a:rPr>
+                <a:solidFill>
+                  <a:srgbClr val="003B4F"/>
+                </a:solidFill>
+                <a:latin typeface="Courier"/>
+              </a:rPr>
+              <a:t>) </a:t>
             </a:r>
             <a:r>
               <a:rPr>
@@ -15204,7 +15312,43 @@
                 </a:solidFill>
                 <a:latin typeface="Courier"/>
               </a:rPr>
-              <a:t>() </a:t>
+              <a:t>(</a:t>
+            </a:r>
+            <a:r>
+              <a:rPr>
+                <a:solidFill>
+                  <a:srgbClr val="657422"/>
+                </a:solidFill>
+                <a:latin typeface="Courier"/>
+              </a:rPr>
+              <a:t>base_size =</a:t>
+            </a:r>
+            <a:r>
+              <a:rPr>
+                <a:solidFill>
+                  <a:srgbClr val="003B4F"/>
+                </a:solidFill>
+                <a:latin typeface="Courier"/>
+              </a:rPr>
+              <a:t> </a:t>
+            </a:r>
+            <a:r>
+              <a:rPr>
+                <a:solidFill>
+                  <a:srgbClr val="AD0000"/>
+                </a:solidFill>
+                <a:latin typeface="Courier"/>
+              </a:rPr>
+              <a:t>9</a:t>
+            </a:r>
+            <a:r>
+              <a:rPr>
+                <a:solidFill>
+                  <a:srgbClr val="003B4F"/>
+                </a:solidFill>
+                <a:latin typeface="Courier"/>
+              </a:rPr>
+              <a:t>) </a:t>
             </a:r>
             <a:r>
               <a:rPr>

--- a/docs/content/t_tests/t_tests_lecture.pptx
+++ b/docs/content/t_tests/t_tests_lecture.pptx
@@ -3908,7 +3908,7 @@
         </p:blipFill>
         <p:spPr bwMode="auto">
           <a:xfrm>
-            <a:off x="127000" y="1701800"/>
+            <a:off x="127000" y="1447800"/>
             <a:ext cx="4432300" cy="2451100"/>
           </a:xfrm>
           <a:prstGeom prst="rect">
@@ -3922,6 +3922,38 @@
           </a:ln>
         </p:spPr>
       </p:pic>
+      <p:sp>
+        <p:nvSpPr>
+          <p:cNvPr id="1" name="TextBox 3"/>
+          <p:cNvSpPr txBox="1"/>
+          <p:nvPr>
+            <p:ph idx="1"/>
+          </p:nvPr>
+        </p:nvSpPr>
+        <p:spPr>
+          <a:xfrm>
+            <a:off x="127000" y="4064000"/>
+            <a:ext cx="4432300" cy="508000"/>
+          </a:xfrm>
+          <a:prstGeom prst="rect">
+            <a:avLst/>
+          </a:prstGeom>
+          <a:noFill/>
+        </p:spPr>
+        <p:txBody>
+          <a:bodyPr/>
+          <a:lstStyle/>
+          <a:p>
+            <a:pPr lvl="0" indent="0" marL="0" algn="ctr">
+              <a:buNone/>
+            </a:pPr>
+            <a:r>
+              <a:rPr/>
+              <a:t>Bell-shaped t-distribution curve with the area to the left of t = 1.328 shaded, illustrating a one-tailed cutoff where the shaded region represents the proportion of the distribution below that t-value.</a:t>
+            </a:r>
+          </a:p>
+        </p:txBody>
+      </p:sp>
       <p:pic>
         <p:nvPicPr>
           <p:cNvPr descr="images/clipboard-4103165911.png" id="0" name="Picture 1"/>
@@ -3938,7 +3970,7 @@
         </p:blipFill>
         <p:spPr bwMode="auto">
           <a:xfrm>
-            <a:off x="4749800" y="1651000"/>
+            <a:off x="4749800" y="1397000"/>
             <a:ext cx="4038600" cy="2578100"/>
           </a:xfrm>
           <a:prstGeom prst="rect">
@@ -3952,6 +3984,38 @@
           </a:ln>
         </p:spPr>
       </p:pic>
+      <p:sp>
+        <p:nvSpPr>
+          <p:cNvPr id="1" name="TextBox 3"/>
+          <p:cNvSpPr txBox="1"/>
+          <p:nvPr>
+            <p:ph idx="1"/>
+          </p:nvPr>
+        </p:nvSpPr>
+        <p:spPr>
+          <a:xfrm>
+            <a:off x="4749800" y="4064000"/>
+            <a:ext cx="4038600" cy="508000"/>
+          </a:xfrm>
+          <a:prstGeom prst="rect">
+            <a:avLst/>
+          </a:prstGeom>
+          <a:noFill/>
+        </p:spPr>
+        <p:txBody>
+          <a:bodyPr/>
+          <a:lstStyle/>
+          <a:p>
+            <a:pPr lvl="0" indent="0" marL="0" algn="ctr">
+              <a:buNone/>
+            </a:pPr>
+            <a:r>
+              <a:rPr/>
+              <a:t>Student’s t critical-value table with the one-tail 0.05 column and df = 7 row highlighted, intersecting at the critical value 1.895, the value used for a one-tailed test at alpha = 0.05.</a:t>
+            </a:r>
+          </a:p>
+        </p:txBody>
+      </p:sp>
     </p:spTree>
   </p:cSld>
 </p:sld>
@@ -4067,7 +4131,7 @@
         </p:blipFill>
         <p:spPr bwMode="auto">
           <a:xfrm>
-            <a:off x="127000" y="1651000"/>
+            <a:off x="127000" y="1397000"/>
             <a:ext cx="4432300" cy="2540000"/>
           </a:xfrm>
           <a:prstGeom prst="rect">
@@ -4081,6 +4145,38 @@
           </a:ln>
         </p:spPr>
       </p:pic>
+      <p:sp>
+        <p:nvSpPr>
+          <p:cNvPr id="1" name="TextBox 3"/>
+          <p:cNvSpPr txBox="1"/>
+          <p:nvPr>
+            <p:ph idx="1"/>
+          </p:nvPr>
+        </p:nvSpPr>
+        <p:spPr>
+          <a:xfrm>
+            <a:off x="127000" y="4064000"/>
+            <a:ext cx="4432300" cy="508000"/>
+          </a:xfrm>
+          <a:prstGeom prst="rect">
+            <a:avLst/>
+          </a:prstGeom>
+          <a:noFill/>
+        </p:spPr>
+        <p:txBody>
+          <a:bodyPr/>
+          <a:lstStyle/>
+          <a:p>
+            <a:pPr lvl="0" indent="0" marL="0" algn="ctr">
+              <a:buNone/>
+            </a:pPr>
+            <a:r>
+              <a:rPr/>
+              <a:t>Bell-shaped t-distribution curve with both tails shaded beyond t = -1.729 and t = 1.729, illustrating a two-tailed cutoff where the two shaded regions together represent the proportion of the distribution outside that range.</a:t>
+            </a:r>
+          </a:p>
+        </p:txBody>
+      </p:sp>
       <p:pic>
         <p:nvPicPr>
           <p:cNvPr descr="images/clipboard-1746531278.png" id="0" name="Picture 1"/>
@@ -4097,7 +4193,7 @@
         </p:blipFill>
         <p:spPr bwMode="auto">
           <a:xfrm>
-            <a:off x="4749800" y="1651000"/>
+            <a:off x="4749800" y="1397000"/>
             <a:ext cx="4038600" cy="2565400"/>
           </a:xfrm>
           <a:prstGeom prst="rect">
@@ -4111,6 +4207,38 @@
           </a:ln>
         </p:spPr>
       </p:pic>
+      <p:sp>
+        <p:nvSpPr>
+          <p:cNvPr id="1" name="TextBox 3"/>
+          <p:cNvSpPr txBox="1"/>
+          <p:nvPr>
+            <p:ph idx="1"/>
+          </p:nvPr>
+        </p:nvSpPr>
+        <p:spPr>
+          <a:xfrm>
+            <a:off x="4749800" y="4064000"/>
+            <a:ext cx="4038600" cy="508000"/>
+          </a:xfrm>
+          <a:prstGeom prst="rect">
+            <a:avLst/>
+          </a:prstGeom>
+          <a:noFill/>
+        </p:spPr>
+        <p:txBody>
+          <a:bodyPr/>
+          <a:lstStyle/>
+          <a:p>
+            <a:pPr lvl="0" indent="0" marL="0" algn="ctr">
+              <a:buNone/>
+            </a:pPr>
+            <a:r>
+              <a:rPr/>
+              <a:t>Student’s t critical-value table with the two-tail 0.05 column and df = 7 row highlighted, intersecting at the critical value 2.365, the value used for a two-tailed test/95% confidence interval at alpha = 0.05.</a:t>
+            </a:r>
+          </a:p>
+        </p:txBody>
+      </p:sp>
       <p:sp>
         <p:nvSpPr>
           <p:cNvPr id="6" name="Content Placeholder 5"/>
@@ -4393,7 +4521,7 @@
         </p:blipFill>
         <p:spPr bwMode="auto">
           <a:xfrm>
-            <a:off x="6121400" y="2019300"/>
+            <a:off x="6121400" y="1765300"/>
             <a:ext cx="2781300" cy="1765300"/>
           </a:xfrm>
           <a:prstGeom prst="rect">
@@ -4407,6 +4535,38 @@
           </a:ln>
         </p:spPr>
       </p:pic>
+      <p:sp>
+        <p:nvSpPr>
+          <p:cNvPr id="1" name="TextBox 3"/>
+          <p:cNvSpPr txBox="1"/>
+          <p:nvPr>
+            <p:ph idx="1"/>
+          </p:nvPr>
+        </p:nvSpPr>
+        <p:spPr>
+          <a:xfrm>
+            <a:off x="6121400" y="4622800"/>
+            <a:ext cx="2781300" cy="508000"/>
+          </a:xfrm>
+          <a:prstGeom prst="rect">
+            <a:avLst/>
+          </a:prstGeom>
+          <a:noFill/>
+        </p:spPr>
+        <p:txBody>
+          <a:bodyPr/>
+          <a:lstStyle/>
+          <a:p>
+            <a:pPr lvl="0" indent="0" marL="0" algn="ctr">
+              <a:buNone/>
+            </a:pPr>
+            <a:r>
+              <a:rPr/>
+              <a:t>Student’s t critical-value table with the two-tail 0.05 column and df = 7 row highlighted, intersecting at the critical value 2.365, the value used for a two-tailed test/95% confidence interval at alpha = 0.05.</a:t>
+            </a:r>
+          </a:p>
+        </p:txBody>
+      </p:sp>
     </p:spTree>
   </p:cSld>
 </p:sld>
@@ -5451,8 +5611,8 @@
         </p:blipFill>
         <p:spPr bwMode="auto">
           <a:xfrm>
-            <a:off x="6121400" y="889000"/>
-            <a:ext cx="2781300" cy="4013200"/>
+            <a:off x="6134100" y="660400"/>
+            <a:ext cx="2743200" cy="3962400"/>
           </a:xfrm>
           <a:prstGeom prst="rect">
             <a:avLst/>
@@ -5465,6 +5625,126 @@
           </a:ln>
         </p:spPr>
       </p:pic>
+      <p:sp>
+        <p:nvSpPr>
+          <p:cNvPr id="1" name="TextBox 3"/>
+          <p:cNvSpPr txBox="1"/>
+          <p:nvPr>
+            <p:ph idx="1"/>
+          </p:nvPr>
+        </p:nvSpPr>
+        <p:spPr>
+          <a:xfrm>
+            <a:off x="6121400" y="4622800"/>
+            <a:ext cx="2781300" cy="508000"/>
+          </a:xfrm>
+          <a:prstGeom prst="rect">
+            <a:avLst/>
+          </a:prstGeom>
+          <a:noFill/>
+        </p:spPr>
+        <p:txBody>
+          <a:bodyPr/>
+          <a:lstStyle/>
+          <a:p>
+            <a:pPr lvl="0" indent="0" marL="0" algn="ctr">
+              <a:buNone/>
+            </a:pPr>
+            <a:r>
+              <a:rPr/>
+              <a:t>Diagram of a large circle labeled ‘population’ with dots representing individuals and Greek-letter parameters (mu, sigma, sigma-squared), with orange arrows showing a subset of dots being drawn down into a small circle labeled ‘sample’ with its statistics (y-bar, s, s-squared), illustrating that a sample is used to estimate unknown population parameters.</a:t>
+            </a:r>
+          </a:p>
+        </p:txBody>
+      </p:sp>
+      <p:sp>
+        <p:nvSpPr>
+          <p:cNvPr id="4" name="Content Placeholder 3"/>
+          <p:cNvSpPr>
+            <a:spLocks noGrp="1"/>
+          </p:cNvSpPr>
+          <p:nvPr>
+            <p:ph idx="2" sz="half"/>
+          </p:nvPr>
+        </p:nvSpPr>
+        <p:spPr/>
+        <p:txBody>
+          <a:bodyPr/>
+          <a:lstStyle/>
+          <a:p>
+            <a:pPr lvl="0" indent="0" marL="1270000">
+              <a:buNone/>
+            </a:pPr>
+            <a:r>
+              <a:rPr sz="2000" b="1"/>
+              <a:t>Note</a:t>
+            </a:r>
+          </a:p>
+          <a:p>
+            <a:pPr lvl="0" indent="0" marL="1270000">
+              <a:buNone/>
+            </a:pPr>
+            <a:r>
+              <a:rPr sz="2000" b="1"/>
+              <a:t>Today’s roadmap</a:t>
+            </a:r>
+          </a:p>
+          <a:p>
+            <a:pPr lvl="0" indent="-342900" marL="342900">
+              <a:buAutoNum type="arabicPeriod"/>
+            </a:pPr>
+            <a:r>
+              <a:rPr sz="2000"/>
+              <a:t>Hypothesis testing framework</a:t>
+            </a:r>
+          </a:p>
+          <a:p>
+            <a:pPr lvl="0" indent="-342900" marL="342900">
+              <a:buAutoNum type="arabicPeriod"/>
+            </a:pPr>
+            <a:r>
+              <a:rPr sz="2000"/>
+              <a:t>The t-distribution</a:t>
+            </a:r>
+          </a:p>
+          <a:p>
+            <a:pPr lvl="0" indent="-342900" marL="342900">
+              <a:buAutoNum type="arabicPeriod"/>
+            </a:pPr>
+            <a:r>
+              <a:rPr sz="2000"/>
+              <a:t>One-sample t-test</a:t>
+            </a:r>
+          </a:p>
+          <a:p>
+            <a:pPr lvl="0" indent="-342900" marL="342900">
+              <a:buAutoNum type="arabicPeriod"/>
+            </a:pPr>
+            <a:r>
+              <a:rPr sz="2000"/>
+              <a:t>Two-sample t-test (Student’s and Welch’s)</a:t>
+            </a:r>
+          </a:p>
+          <a:p>
+            <a:pPr lvl="0" indent="-342900" marL="342900">
+              <a:buAutoNum type="arabicPeriod"/>
+            </a:pPr>
+            <a:r>
+              <a:rPr sz="2000"/>
+              <a:t>Paired t-test</a:t>
+            </a:r>
+          </a:p>
+          <a:p>
+            <a:pPr lvl="0" indent="-342900" marL="342900">
+              <a:buAutoNum type="arabicPeriod"/>
+            </a:pPr>
+            <a:r>
+              <a:rPr sz="2000"/>
+              <a:t>Checking assumptions throughout</a:t>
+            </a:r>
+          </a:p>
+        </p:txBody>
+      </p:sp>
     </p:spTree>
   </p:cSld>
 </p:sld>
@@ -7015,7 +7295,7 @@
         </p:blipFill>
         <p:spPr bwMode="auto">
           <a:xfrm>
-            <a:off x="6121400" y="1498600"/>
+            <a:off x="6121400" y="1244600"/>
             <a:ext cx="2781300" cy="2781300"/>
           </a:xfrm>
           <a:prstGeom prst="rect">
@@ -7029,6 +7309,38 @@
           </a:ln>
         </p:spPr>
       </p:pic>
+      <p:sp>
+        <p:nvSpPr>
+          <p:cNvPr id="1" name="TextBox 3"/>
+          <p:cNvSpPr txBox="1"/>
+          <p:nvPr>
+            <p:ph idx="1"/>
+          </p:nvPr>
+        </p:nvSpPr>
+        <p:spPr>
+          <a:xfrm>
+            <a:off x="6121400" y="4622800"/>
+            <a:ext cx="2781300" cy="508000"/>
+          </a:xfrm>
+          <a:prstGeom prst="rect">
+            <a:avLst/>
+          </a:prstGeom>
+          <a:noFill/>
+        </p:spPr>
+        <p:txBody>
+          <a:bodyPr/>
+          <a:lstStyle/>
+          <a:p>
+            <a:pPr lvl="0" indent="0" marL="0" algn="ctr">
+              <a:buNone/>
+            </a:pPr>
+            <a:r>
+              <a:rPr/>
+              <a:t>Photo of two separate green pine branches side by side, each with needle clusters, representing the two independent samples (populations X and Y) being compared in a two-sample t-test.</a:t>
+            </a:r>
+          </a:p>
+        </p:txBody>
+      </p:sp>
     </p:spTree>
   </p:cSld>
 </p:sld>

--- a/docs/content/t_tests/t_tests_lecture.pptx
+++ b/docs/content/t_tests/t_tests_lecture.pptx
@@ -51,6 +51,7 @@
     <p:sldId id="299" r:id="rId45"/>
     <p:sldId id="300" r:id="rId46"/>
     <p:sldId id="301" r:id="rId47"/>
+    <p:sldId id="302" r:id="rId48"/>
   </p:sldIdLst>
   <p:sldSz cx="9144000" cy="5143500" type="screen16x9"/>
   <p:notesSz cx="6858000" cy="9144000"/>
@@ -3949,7 +3950,7 @@
             </a:pPr>
             <a:r>
               <a:rPr/>
-              <a:t>Bell-shaped t-distribution curve with the area to the left of t = 1.328 shaded, illustrating a one-tailed cutoff where the shaded region represents the proportion of the distribution below that t-value.</a:t>
+              <a:t>Bell-shaped t-distribution curve with the area to the left of the critical value shaded, illustrating a one-tailed cutoff where the shaded region represents the proportion of the distribution below that t-value (here t = 1.895 at df = 7).</a:t>
             </a:r>
           </a:p>
         </p:txBody>
@@ -4172,7 +4173,7 @@
             </a:pPr>
             <a:r>
               <a:rPr/>
-              <a:t>Bell-shaped t-distribution curve with both tails shaded beyond t = -1.729 and t = 1.729, illustrating a two-tailed cutoff where the two shaded regions together represent the proportion of the distribution outside that range.</a:t>
+              <a:t>Bell-shaped t-distribution curve with both tails shaded beyond the critical values (here t = -2.365 and t = 2.365 at df = 7), illustrating a two-tailed cutoff where the two shaded regions together represent the proportion of the distribution outside that range.</a:t>
             </a:r>
           </a:p>
         </p:txBody>
@@ -5028,17 +5029,9 @@
                 </a:solidFill>
                 <a:latin typeface="Courier"/>
               </a:rPr>
-              <a:t># YOUR </a:t>
-            </a:r>
-            <a:r>
-              <a:rPr>
-                <a:solidFill>
-                  <a:srgbClr val="AD0000"/>
-                </a:solidFill>
-                <a:latin typeface="Courier"/>
-              </a:rPr>
-              <a:t>TASK</a:t>
-            </a:r>
+              <a:t># The one-sample test below is on the SHADY side, so that is the group</a:t>
+            </a:r>
+            <a:br/>
             <a:r>
               <a:rPr>
                 <a:solidFill>
@@ -5046,7 +5039,7 @@
                 </a:solidFill>
                 <a:latin typeface="Courier"/>
               </a:rPr>
-              <a:t>: Test normality of all pine needle lengths</a:t>
+              <a:t># whose normality we need to check -- not the two sides pooled together.</a:t>
             </a:r>
             <a:br/>
             <a:r>
@@ -5065,7 +5058,7 @@
                 </a:solidFill>
                 <a:latin typeface="Courier"/>
               </a:rPr>
-              <a:t>(ps_df</a:t>
+              <a:t>(ps_shady_df</a:t>
             </a:r>
             <a:r>
               <a:rPr>
@@ -5120,7 +5113,7 @@
                 </a:solidFill>
                 <a:latin typeface="Courier"/>
               </a:rPr>
-              <a:t>"QQ Plot for length of pine needles"</a:t>
+              <a:t>"QQ Plot — shady side needle length"</a:t>
             </a:r>
             <a:r>
               <a:rPr>
@@ -5232,7 +5225,7 @@
               <a:rPr>
                 <a:latin typeface="Courier"/>
               </a:rPr>
-              <a:t>[1]  8 11</a:t>
+              <a:t>[1] 7 6</a:t>
             </a:r>
           </a:p>
         </p:txBody>
@@ -5369,7 +5362,7 @@
                 </a:solidFill>
                 <a:latin typeface="Courier"/>
               </a:rPr>
-              <a:t>(ps_df</a:t>
+              <a:t>(ps_shady_df</a:t>
             </a:r>
             <a:r>
               <a:rPr>
@@ -5400,8 +5393,8 @@
               </a:rPr>
               <a:t>
     Shapiro-Wilk normality test
-data:  ps_df$length_mm
-W = 0.92754, p-value = 0.2228</a:t>
+data:  ps_shady_df$length_mm
+W = 0.96639, p-value = 0.8683</a:t>
             </a:r>
           </a:p>
         </p:txBody>
@@ -5448,6 +5441,33 @@
             <a:r>
               <a:rPr sz="2000"/>
               <a:t> result (p &gt; 0.05) is what we’re hoping for here — it means we fail to reject normality.</a:t>
+            </a:r>
+          </a:p>
+          <a:p>
+            <a:pPr lvl="0" indent="0" marL="1270000">
+              <a:buNone/>
+            </a:pPr>
+            <a:r>
+              <a:rPr sz="2000" b="1"/>
+              <a:t>Tip</a:t>
+            </a:r>
+          </a:p>
+          <a:p>
+            <a:pPr lvl="0" indent="0" marL="1270000">
+              <a:buNone/>
+            </a:pPr>
+            <a:r>
+              <a:rPr sz="2000" b="1"/>
+              <a:t>🖐 Why the shady side only?</a:t>
+            </a:r>
+          </a:p>
+          <a:p>
+            <a:pPr lvl="0" indent="0" marL="1270000">
+              <a:buNone/>
+            </a:pPr>
+            <a:r>
+              <a:rPr sz="2000"/>
+              <a:t>We test the group the hypothesis is about. Pooling shady and sunny would mix two distributions with different means, which can look non-normal even when each group is perfectly normal.</a:t>
             </a:r>
           </a:p>
         </p:txBody>
@@ -7938,7 +7958,30 @@
                 <a:pPr lvl="0"/>
                 <a:r>
                   <a:rPr/>
-                  <a:t>s²ₚ: pooled variance = [(n₁−1)s₁² + (n₂−1)s₂²] / (n₁+n₂−2)</a:t>
+                  <a:t>s²ₚ: </a:t>
+                </a:r>
+                <a:r>
+                  <a:rPr b="1"/>
+                  <a:t>pooled variance</a:t>
+                </a:r>
+                <a:r>
+                  <a:rPr/>
+                  <a:t> = [(n₁−1)s₁² + (n₂−1)s₂²] / (n₁+n₂−2)</a:t>
+                </a:r>
+              </a:p>
+              <a:p>
+                <a:pPr lvl="0"/>
+                <a:r>
+                  <a:rPr/>
+                  <a:t>Sₚ = √s²ₚ: the </a:t>
+                </a:r>
+                <a:r>
+                  <a:rPr b="1"/>
+                  <a:t>pooled standard deviation</a:t>
+                </a:r>
+                <a:r>
+                  <a:rPr/>
+                  <a:t> (that’s what appears in the formula)</a:t>
                 </a:r>
               </a:p>
               <a:p>
@@ -7952,7 +7995,15 @@
                 <a:pPr lvl="0"/>
                 <a:r>
                   <a:rPr/>
-                  <a:t>√(1/n₁ + 1/n₂): the pooled standard error</a:t>
+                  <a:t>Sₚ√(1/n₁ + 1/n₂): the </a:t>
+                </a:r>
+                <a:r>
+                  <a:rPr b="1"/>
+                  <a:t>standard error of the difference</a:t>
+                </a:r>
+                <a:r>
+                  <a:rPr/>
+                  <a:t> — the whole denominator, not just the square-root term</a:t>
                 </a:r>
               </a:p>
               <a:p>
@@ -8308,7 +8359,43 @@
                 </a:solidFill>
                 <a:latin typeface="Courier"/>
               </a:rPr>
-              <a:t>(length_mm),</a:t>
+              <a:t>(length_mm, </a:t>
+            </a:r>
+            <a:r>
+              <a:rPr>
+                <a:solidFill>
+                  <a:srgbClr val="657422"/>
+                </a:solidFill>
+                <a:latin typeface="Courier"/>
+              </a:rPr>
+              <a:t>na.rm =</a:t>
+            </a:r>
+            <a:r>
+              <a:rPr>
+                <a:solidFill>
+                  <a:srgbClr val="003B4F"/>
+                </a:solidFill>
+                <a:latin typeface="Courier"/>
+              </a:rPr>
+              <a:t> </a:t>
+            </a:r>
+            <a:r>
+              <a:rPr>
+                <a:solidFill>
+                  <a:srgbClr val="8F5902"/>
+                </a:solidFill>
+                <a:latin typeface="Courier"/>
+              </a:rPr>
+              <a:t>TRUE</a:t>
+            </a:r>
+            <a:r>
+              <a:rPr>
+                <a:solidFill>
+                  <a:srgbClr val="003B4F"/>
+                </a:solidFill>
+                <a:latin typeface="Courier"/>
+              </a:rPr>
+              <a:t>),</a:t>
             </a:r>
             <a:br/>
             <a:r>
@@ -8354,7 +8441,43 @@
                 </a:solidFill>
                 <a:latin typeface="Courier"/>
               </a:rPr>
-              <a:t>(length_mm),</a:t>
+              <a:t>(length_mm, </a:t>
+            </a:r>
+            <a:r>
+              <a:rPr>
+                <a:solidFill>
+                  <a:srgbClr val="657422"/>
+                </a:solidFill>
+                <a:latin typeface="Courier"/>
+              </a:rPr>
+              <a:t>na.rm =</a:t>
+            </a:r>
+            <a:r>
+              <a:rPr>
+                <a:solidFill>
+                  <a:srgbClr val="003B4F"/>
+                </a:solidFill>
+                <a:latin typeface="Courier"/>
+              </a:rPr>
+              <a:t> </a:t>
+            </a:r>
+            <a:r>
+              <a:rPr>
+                <a:solidFill>
+                  <a:srgbClr val="8F5902"/>
+                </a:solidFill>
+                <a:latin typeface="Courier"/>
+              </a:rPr>
+              <a:t>TRUE</a:t>
+            </a:r>
+            <a:r>
+              <a:rPr>
+                <a:solidFill>
+                  <a:srgbClr val="003B4F"/>
+                </a:solidFill>
+                <a:latin typeface="Courier"/>
+              </a:rPr>
+              <a:t>),</a:t>
             </a:r>
             <a:br/>
             <a:r>
@@ -8391,16 +8514,43 @@
                 </a:solidFill>
                 <a:latin typeface="Courier"/>
               </a:rPr>
-              <a:t>n</a:t>
-            </a:r>
-            <a:r>
-              <a:rPr>
-                <a:solidFill>
-                  <a:srgbClr val="003B4F"/>
-                </a:solidFill>
-                <a:latin typeface="Courier"/>
-              </a:rPr>
-              <a:t>(),</a:t>
+              <a:t>sum</a:t>
+            </a:r>
+            <a:r>
+              <a:rPr>
+                <a:solidFill>
+                  <a:srgbClr val="003B4F"/>
+                </a:solidFill>
+                <a:latin typeface="Courier"/>
+              </a:rPr>
+              <a:t>(</a:t>
+            </a:r>
+            <a:r>
+              <a:rPr>
+                <a:solidFill>
+                  <a:srgbClr val="5E5E5E"/>
+                </a:solidFill>
+                <a:latin typeface="Courier"/>
+              </a:rPr>
+              <a:t>!</a:t>
+            </a:r>
+            <a:r>
+              <a:rPr>
+                <a:solidFill>
+                  <a:srgbClr val="4758AB"/>
+                </a:solidFill>
+                <a:latin typeface="Courier"/>
+              </a:rPr>
+              <a:t>is.na</a:t>
+            </a:r>
+            <a:r>
+              <a:rPr>
+                <a:solidFill>
+                  <a:srgbClr val="003B4F"/>
+                </a:solidFill>
+                <a:latin typeface="Courier"/>
+              </a:rPr>
+              <a:t>(length_mm)),</a:t>
             </a:r>
             <a:br/>
             <a:r>
@@ -8464,7 +8614,44 @@
                 </a:solidFill>
                 <a:latin typeface="Courier"/>
               </a:rPr>
-              <a:t>(n)</a:t>
+              <a:t>(n),</a:t>
+            </a:r>
+            <a:br/>
+            <a:r>
+              <a:rPr>
+                <a:solidFill>
+                  <a:srgbClr val="003B4F"/>
+                </a:solidFill>
+                <a:latin typeface="Courier"/>
+              </a:rPr>
+              <a:t>    </a:t>
+            </a:r>
+            <a:r>
+              <a:rPr>
+                <a:solidFill>
+                  <a:srgbClr val="657422"/>
+                </a:solidFill>
+                <a:latin typeface="Courier"/>
+              </a:rPr>
+              <a:t>.groups =</a:t>
+            </a:r>
+            <a:r>
+              <a:rPr>
+                <a:solidFill>
+                  <a:srgbClr val="003B4F"/>
+                </a:solidFill>
+                <a:latin typeface="Courier"/>
+              </a:rPr>
+              <a:t> </a:t>
+            </a:r>
+            <a:r>
+              <a:rPr>
+                <a:solidFill>
+                  <a:srgbClr val="20794D"/>
+                </a:solidFill>
+                <a:latin typeface="Courier"/>
+              </a:rPr>
+              <a:t>"drop"</a:t>
             </a:r>
             <a:br/>
             <a:r>
@@ -9690,7 +9877,6 @@
                 <a:latin typeface="Courier"/>
               </a:rPr>
               <a:t># A tibble: 6 × 5
-# Groups:   group, tree_no, tree_char [6]
   group                      tree_no tree_char side  length_mm
   &lt;chr&gt;                        &lt;dbl&gt; &lt;chr&gt;     &lt;chr&gt;     &lt;dbl&gt;
 1 big_fat_fecund_female_fish       2 tree_2    shady      15.4
@@ -9733,7 +9919,6 @@
                 <a:latin typeface="Courier"/>
               </a:rPr>
               <a:t># A tibble: 6 × 5
-# Groups:   group, tree_no, tree_char [6]
   group                      tree_no tree_char side  length_mm
   &lt;chr&gt;                        &lt;dbl&gt; &lt;chr&gt;     &lt;chr&gt;     &lt;dbl&gt;
 1 big_fat_fecund_female_fish       2 tree_2    sunny      13.2
@@ -10321,6 +10506,16 @@
             <a:r>
               <a:rPr>
                 <a:solidFill>
+                  <a:srgbClr val="5E5E5E"/>
+                </a:solidFill>
+                <a:latin typeface="Courier"/>
+              </a:rPr>
+              <a:t># leveneTest needs the grouping variable as a factor</a:t>
+            </a:r>
+            <a:br/>
+            <a:r>
+              <a:rPr>
+                <a:solidFill>
                   <a:srgbClr val="003B4F"/>
                 </a:solidFill>
                 <a:latin typeface="Courier"/>
@@ -10361,7 +10556,25 @@
                 </a:solidFill>
                 <a:latin typeface="Courier"/>
               </a:rPr>
-              <a:t> side, </a:t>
+              <a:t> </a:t>
+            </a:r>
+            <a:r>
+              <a:rPr>
+                <a:solidFill>
+                  <a:srgbClr val="4758AB"/>
+                </a:solidFill>
+                <a:latin typeface="Courier"/>
+              </a:rPr>
+              <a:t>factor</a:t>
+            </a:r>
+            <a:r>
+              <a:rPr>
+                <a:solidFill>
+                  <a:srgbClr val="003B4F"/>
+                </a:solidFill>
+                <a:latin typeface="Courier"/>
+              </a:rPr>
+              <a:t>(side), </a:t>
             </a:r>
             <a:r>
               <a:rPr>
@@ -11666,7 +11879,15 @@
             </a:pPr>
             <a:r>
               <a:rPr sz="2000"/>
-              <a:t>For two sample T-tests, degrees of freedom = n₁ + n₂ − 2. With 8 needles per side, df = 8 + 8 − 2 = 14.</a:t>
+              <a:t>For two sample T-tests, degrees of freedom = n₁ + n₂ − 2. Once we average the needles up to one value per tree side (next slide), we have 8 trees per side — so df = 8 + 8 − 2 = 14. Note that n is the number of </a:t>
+            </a:r>
+            <a:r>
+              <a:rPr sz="2000" i="1"/>
+              <a:t>trees</a:t>
+            </a:r>
+            <a:r>
+              <a:rPr sz="2000"/>
+              <a:t>, not needles.</a:t>
             </a:r>
           </a:p>
         </p:txBody>
@@ -12498,7 +12719,7 @@
             </a:pPr>
             <a:r>
               <a:rPr/>
-              <a:t>What Is Going On?</a:t>
+              <a:t>Same Data, Two Different Answers</a:t>
             </a:r>
           </a:p>
         </p:txBody>
@@ -12523,27 +12744,298 @@
             </a:pPr>
             <a:r>
               <a:rPr/>
-              <a:t>Note that there is a lot of variation </a:t>
-            </a:r>
-            <a:r>
-              <a:rPr i="1"/>
-              <a:t>within</a:t>
+              <a:t>Look carefully at what just happened — </a:t>
+            </a:r>
+            <a:r>
+              <a:rPr b="1"/>
+              <a:t>both tests used exactly the same 16 numbers</a:t>
             </a:r>
             <a:r>
               <a:rPr/>
-              <a:t> trees, but the trend is the same across trees.</a:t>
-            </a:r>
-          </a:p>
-        </p:txBody>
-      </p:sp>
-      <p:sp>
-        <p:nvSpPr>
-          <p:cNvPr id="5" name="Text Placeholder 4"/>
+              <a:t>:</a:t>
+            </a:r>
+          </a:p>
+        </p:txBody>
+      </p:sp>
+      <p:graphicFrame>
+        <p:nvGraphicFramePr>
+          <p:cNvPr id="6" name="Content Placeholder 5"/>
+          <p:cNvGraphicFramePr>
+            <a:graphicFrameLocks noGrp="1"/>
+          </p:cNvGraphicFramePr>
+          <p:nvPr>
+            <p:ph idx="1"/>
+          </p:nvPr>
+        </p:nvGraphicFramePr>
+        <p:xfrm>
+          <a:off x="127000" y="1270000"/>
+          <a:ext cx="4432300" cy="3302000"/>
+        </p:xfrm>
+        <a:graphic>
+          <a:graphicData uri="http://schemas.openxmlformats.org/drawingml/2006/table">
+            <a:tbl>
+              <a:tblPr firstRow="1" bandRow="1">
+                <a:tableStyleId>{5C22544A-7EE6-4342-B048-85BDC9FD1C3A}</a:tableStyleId>
+              </a:tblPr>
+              <a:tblGrid>
+                <a:gridCol w="876300"/>
+                <a:gridCol w="876300"/>
+                <a:gridCol w="876300"/>
+                <a:gridCol w="876300"/>
+                <a:gridCol w="876300"/>
+              </a:tblGrid>
+              <a:tr h="0">
+                <a:tc>
+                  <a:txBody>
+                    <a:bodyPr/>
+                    <a:lstStyle/>
+                    <a:p>
+                      <a:pPr lvl="0" indent="0" marL="0">
+                        <a:buNone/>
+                      </a:pPr>
+                      <a:r>
+                        <a:rPr/>
+                        <a:t>Test</a:t>
+                      </a:r>
+                    </a:p>
+                  </a:txBody>
+                  <a:tcPr/>
+                </a:tc>
+                <a:tc>
+                  <a:txBody>
+                    <a:bodyPr/>
+                    <a:lstStyle/>
+                    <a:p>
+                      <a:pPr lvl="0" indent="0" marL="0">
+                        <a:buNone/>
+                      </a:pPr>
+                      <a:r>
+                        <a:rPr/>
+                        <a:t>t</a:t>
+                      </a:r>
+                    </a:p>
+                  </a:txBody>
+                  <a:tcPr/>
+                </a:tc>
+                <a:tc>
+                  <a:txBody>
+                    <a:bodyPr/>
+                    <a:lstStyle/>
+                    <a:p>
+                      <a:pPr lvl="0" indent="0" marL="0">
+                        <a:buNone/>
+                      </a:pPr>
+                      <a:r>
+                        <a:rPr/>
+                        <a:t>df</a:t>
+                      </a:r>
+                    </a:p>
+                  </a:txBody>
+                  <a:tcPr/>
+                </a:tc>
+                <a:tc>
+                  <a:txBody>
+                    <a:bodyPr/>
+                    <a:lstStyle/>
+                    <a:p>
+                      <a:pPr lvl="0" indent="0" marL="0">
+                        <a:buNone/>
+                      </a:pPr>
+                      <a:r>
+                        <a:rPr/>
+                        <a:t>p</a:t>
+                      </a:r>
+                    </a:p>
+                  </a:txBody>
+                  <a:tcPr/>
+                </a:tc>
+                <a:tc>
+                  <a:txBody>
+                    <a:bodyPr/>
+                    <a:lstStyle/>
+                    <a:p>
+                      <a:pPr lvl="0" indent="0" marL="0">
+                        <a:buNone/>
+                      </a:pPr>
+                      <a:r>
+                        <a:rPr/>
+                        <a:t>Conclusion</a:t>
+                      </a:r>
+                    </a:p>
+                  </a:txBody>
+                  <a:tcPr/>
+                </a:tc>
+              </a:tr>
+              <a:tr h="0">
+                <a:tc>
+                  <a:txBody>
+                    <a:bodyPr/>
+                    <a:lstStyle/>
+                    <a:p>
+                      <a:pPr lvl="0" indent="0" marL="0">
+                        <a:buNone/>
+                      </a:pPr>
+                      <a:r>
+                        <a:rPr/>
+                        <a:t>Two-sample</a:t>
+                      </a:r>
+                    </a:p>
+                  </a:txBody>
+                </a:tc>
+                <a:tc>
+                  <a:txBody>
+                    <a:bodyPr/>
+                    <a:lstStyle/>
+                    <a:p>
+                      <a:pPr lvl="0" indent="0" marL="0">
+                        <a:buNone/>
+                      </a:pPr>
+                      <a:r>
+                        <a:rPr/>
+                        <a:t>1.128</a:t>
+                      </a:r>
+                    </a:p>
+                  </a:txBody>
+                </a:tc>
+                <a:tc>
+                  <a:txBody>
+                    <a:bodyPr/>
+                    <a:lstStyle/>
+                    <a:p>
+                      <a:pPr lvl="0" indent="0" marL="0">
+                        <a:buNone/>
+                      </a:pPr>
+                      <a:r>
+                        <a:rPr/>
+                        <a:t>14</a:t>
+                      </a:r>
+                    </a:p>
+                  </a:txBody>
+                </a:tc>
+                <a:tc>
+                  <a:txBody>
+                    <a:bodyPr/>
+                    <a:lstStyle/>
+                    <a:p>
+                      <a:pPr lvl="0" indent="0" marL="0">
+                        <a:buNone/>
+                      </a:pPr>
+                      <a:r>
+                        <a:rPr/>
+                        <a:t>0.278</a:t>
+                      </a:r>
+                    </a:p>
+                  </a:txBody>
+                </a:tc>
+                <a:tc>
+                  <a:txBody>
+                    <a:bodyPr/>
+                    <a:lstStyle/>
+                    <a:p>
+                      <a:pPr lvl="0" indent="0" marL="0">
+                        <a:buNone/>
+                      </a:pPr>
+                      <a:r>
+                        <a:rPr b="1"/>
+                        <a:t>Not</a:t>
+                      </a:r>
+                      <a:r>
+                        <a:rPr/>
+                        <a:t> significant</a:t>
+                      </a:r>
+                    </a:p>
+                  </a:txBody>
+                </a:tc>
+              </a:tr>
+              <a:tr h="0">
+                <a:tc>
+                  <a:txBody>
+                    <a:bodyPr/>
+                    <a:lstStyle/>
+                    <a:p>
+                      <a:pPr lvl="0" indent="0" marL="0">
+                        <a:buNone/>
+                      </a:pPr>
+                      <a:r>
+                        <a:rPr/>
+                        <a:t>Paired</a:t>
+                      </a:r>
+                    </a:p>
+                  </a:txBody>
+                </a:tc>
+                <a:tc>
+                  <a:txBody>
+                    <a:bodyPr/>
+                    <a:lstStyle/>
+                    <a:p>
+                      <a:pPr lvl="0" indent="0" marL="0">
+                        <a:buNone/>
+                      </a:pPr>
+                      <a:r>
+                        <a:rPr/>
+                        <a:t>−2.782</a:t>
+                      </a:r>
+                    </a:p>
+                  </a:txBody>
+                </a:tc>
+                <a:tc>
+                  <a:txBody>
+                    <a:bodyPr/>
+                    <a:lstStyle/>
+                    <a:p>
+                      <a:pPr lvl="0" indent="0" marL="0">
+                        <a:buNone/>
+                      </a:pPr>
+                      <a:r>
+                        <a:rPr/>
+                        <a:t>7</a:t>
+                      </a:r>
+                    </a:p>
+                  </a:txBody>
+                </a:tc>
+                <a:tc>
+                  <a:txBody>
+                    <a:bodyPr/>
+                    <a:lstStyle/>
+                    <a:p>
+                      <a:pPr lvl="0" indent="0" marL="0">
+                        <a:buNone/>
+                      </a:pPr>
+                      <a:r>
+                        <a:rPr/>
+                        <a:t>0.027</a:t>
+                      </a:r>
+                    </a:p>
+                  </a:txBody>
+                </a:tc>
+                <a:tc>
+                  <a:txBody>
+                    <a:bodyPr/>
+                    <a:lstStyle/>
+                    <a:p>
+                      <a:pPr lvl="0" indent="0" marL="0">
+                        <a:buNone/>
+                      </a:pPr>
+                      <a:r>
+                        <a:rPr b="1"/>
+                        <a:t>Significant</a:t>
+                      </a:r>
+                    </a:p>
+                  </a:txBody>
+                </a:tc>
+              </a:tr>
+            </a:tbl>
+          </a:graphicData>
+        </a:graphic>
+      </p:graphicFrame>
+      <p:sp>
+        <p:nvSpPr>
+          <p:cNvPr id="4" name="Content Placeholder 3"/>
           <p:cNvSpPr>
             <a:spLocks noGrp="1"/>
           </p:cNvSpPr>
           <p:nvPr>
-            <p:ph idx="3" sz="quarter" type="body"/>
+            <p:ph idx="2" sz="half"/>
           </p:nvPr>
         </p:nvSpPr>
         <p:spPr/>
@@ -12551,17 +13043,88 @@
           <a:bodyPr/>
           <a:lstStyle/>
           <a:p>
-            <a:pPr lvl="0" indent="0">
-              <a:buNone/>
-            </a:pPr>
-            <a:r>
-              <a:rPr>
-                <a:solidFill>
-                  <a:srgbClr val="003B4F"/>
-                </a:solidFill>
-                <a:latin typeface="Courier"/>
-              </a:rPr>
-              <a:t>ps_plot</a:t>
+            <a:pPr lvl="0" indent="0" marL="0">
+              <a:buNone/>
+            </a:pPr>
+            <a:r>
+              <a:rPr/>
+              <a:t>Why the difference?</a:t>
+            </a:r>
+          </a:p>
+          <a:p>
+            <a:pPr lvl="0"/>
+            <a:r>
+              <a:rPr/>
+              <a:t>The </a:t>
+            </a:r>
+            <a:r>
+              <a:rPr b="1"/>
+              <a:t>two-sample</a:t>
+            </a:r>
+            <a:r>
+              <a:rPr/>
+              <a:t> test throws the pairing away. Tree-to-tree variation (some teams’ trees just have longer needles) lands in the </a:t>
+            </a:r>
+            <a:r>
+              <a:rPr i="1"/>
+              <a:t>noise</a:t>
+            </a:r>
+            <a:r>
+              <a:rPr/>
+              <a:t>, swamping the signal.</a:t>
+            </a:r>
+          </a:p>
+          <a:p>
+            <a:pPr lvl="0"/>
+            <a:r>
+              <a:rPr/>
+              <a:t>The </a:t>
+            </a:r>
+            <a:r>
+              <a:rPr b="1"/>
+              <a:t>paired</a:t>
+            </a:r>
+            <a:r>
+              <a:rPr/>
+              <a:t> test looks only at the shady−sunny difference </a:t>
+            </a:r>
+            <a:r>
+              <a:rPr i="1"/>
+              <a:t>within each tree</a:t>
+            </a:r>
+            <a:r>
+              <a:rPr/>
+              <a:t>, so tree-to-tree variation cancels out entirely.</a:t>
+            </a:r>
+          </a:p>
+          <a:p>
+            <a:pPr lvl="0" indent="0" marL="1270000">
+              <a:buNone/>
+            </a:pPr>
+            <a:r>
+              <a:rPr sz="2000" b="1"/>
+              <a:t>Important</a:t>
+            </a:r>
+          </a:p>
+          <a:p>
+            <a:pPr lvl="0" indent="0" marL="1270000">
+              <a:buNone/>
+            </a:pPr>
+            <a:r>
+              <a:rPr sz="2000" b="1"/>
+              <a:t>These data are paired by design</a:t>
+            </a:r>
+            <a:r>
+              <a:rPr sz="2000"/>
+              <a:t> — each team measured both sides of the </a:t>
+            </a:r>
+            <a:r>
+              <a:rPr sz="2000" i="1"/>
+              <a:t>same</a:t>
+            </a:r>
+            <a:r>
+              <a:rPr sz="2000"/>
+              <a:t> tree. The paired test is the correct one here; the two-sample test is the wrong tool, and it would have made us miss a real effect.</a:t>
             </a:r>
           </a:p>
         </p:txBody>
@@ -12630,8 +13193,8 @@
         </p:nvSpPr>
         <p:spPr>
           <a:xfrm>
-            <a:off x="0" y="0"/>
-            <a:ext cx="9144000" cy="582780"/>
+            <a:off x="139485" y="78119"/>
+            <a:ext cx="8229600" cy="607682"/>
           </a:xfrm>
         </p:spPr>
         <p:txBody>
@@ -12643,11 +13206,104 @@
             </a:pPr>
             <a:r>
               <a:rPr/>
-              <a:t>Part 7 · Assumptions and Wrap-Up</a:t>
-            </a:r>
-          </a:p>
-        </p:txBody>
-      </p:sp>
+              <a:t>What Is Going On?</a:t>
+            </a:r>
+          </a:p>
+        </p:txBody>
+      </p:sp>
+      <p:sp>
+        <p:nvSpPr>
+          <p:cNvPr id="3" name="Text Placeholder 2"/>
+          <p:cNvSpPr>
+            <a:spLocks noGrp="1"/>
+          </p:cNvSpPr>
+          <p:nvPr>
+            <p:ph idx="1" type="body"/>
+          </p:nvPr>
+        </p:nvSpPr>
+        <p:spPr/>
+        <p:txBody>
+          <a:bodyPr/>
+          <a:lstStyle/>
+          <a:p>
+            <a:pPr lvl="0" indent="0" marL="0">
+              <a:buNone/>
+            </a:pPr>
+            <a:r>
+              <a:rPr/>
+              <a:t>Note that there is a lot of variation </a:t>
+            </a:r>
+            <a:r>
+              <a:rPr i="1"/>
+              <a:t>within</a:t>
+            </a:r>
+            <a:r>
+              <a:rPr/>
+              <a:t> trees, but the trend is the same across trees.</a:t>
+            </a:r>
+          </a:p>
+        </p:txBody>
+      </p:sp>
+      <p:sp>
+        <p:nvSpPr>
+          <p:cNvPr id="5" name="Text Placeholder 4"/>
+          <p:cNvSpPr>
+            <a:spLocks noGrp="1"/>
+          </p:cNvSpPr>
+          <p:nvPr>
+            <p:ph idx="3" sz="quarter" type="body"/>
+          </p:nvPr>
+        </p:nvSpPr>
+        <p:spPr/>
+        <p:txBody>
+          <a:bodyPr/>
+          <a:lstStyle/>
+          <a:p>
+            <a:pPr lvl="0" indent="0">
+              <a:buNone/>
+            </a:pPr>
+            <a:r>
+              <a:rPr>
+                <a:solidFill>
+                  <a:srgbClr val="003B4F"/>
+                </a:solidFill>
+                <a:latin typeface="Courier"/>
+              </a:rPr>
+              <a:t>ps_plot</a:t>
+            </a:r>
+          </a:p>
+        </p:txBody>
+      </p:sp>
+      <p:pic>
+        <p:nvPicPr>
+          <p:cNvPr descr="t_tests_lecture_files/figure-pptx/unnamed-chunk-24-1.png" id="0" name="Picture 1"/>
+          <p:cNvPicPr>
+            <a:picLocks noGrp="1" noChangeAspect="1"/>
+          </p:cNvPicPr>
+          <p:nvPr/>
+        </p:nvPicPr>
+        <p:blipFill>
+          <a:blip r:embed="rId2"/>
+          <a:stretch>
+            <a:fillRect/>
+          </a:stretch>
+        </p:blipFill>
+        <p:spPr bwMode="auto">
+          <a:xfrm>
+            <a:off x="4876800" y="1295400"/>
+            <a:ext cx="3784600" cy="3276600"/>
+          </a:xfrm>
+          <a:prstGeom prst="rect">
+            <a:avLst/>
+          </a:prstGeom>
+          <a:noFill/>
+          <a:ln w="9525">
+            <a:noFill/>
+            <a:headEnd/>
+            <a:tailEnd/>
+          </a:ln>
+        </p:spPr>
+      </p:pic>
     </p:spTree>
   </p:cSld>
 </p:sld>
@@ -12683,11 +13339,8 @@
         <p:spPr>
           <a:xfrm>
             <a:off x="0" y="0"/>
-            <a:ext cx="9144000" cy="602780"/>
+            <a:ext cx="9144000" cy="582780"/>
           </a:xfrm>
-          <a:solidFill>
-            <a:srgbClr val="70121D"/>
-          </a:solidFill>
         </p:spPr>
         <p:txBody>
           <a:bodyPr/>
@@ -12698,123 +13351,7 @@
             </a:pPr>
             <a:r>
               <a:rPr/>
-              <a:t>Assumptions of Parametric Tests</a:t>
-            </a:r>
-          </a:p>
-        </p:txBody>
-      </p:sp>
-      <p:sp>
-        <p:nvSpPr>
-          <p:cNvPr id="3" name="Content Placeholder 2"/>
-          <p:cNvSpPr>
-            <a:spLocks noGrp="1"/>
-          </p:cNvSpPr>
-          <p:nvPr>
-            <p:ph idx="1" sz="half"/>
-          </p:nvPr>
-        </p:nvSpPr>
-        <p:spPr/>
-        <p:txBody>
-          <a:bodyPr/>
-          <a:lstStyle/>
-          <a:p>
-            <a:pPr lvl="0" indent="0" marL="0">
-              <a:buNone/>
-            </a:pPr>
-            <a:r>
-              <a:rPr b="1"/>
-              <a:t>Common assumptions for t-tests:</a:t>
-            </a:r>
-          </a:p>
-          <a:p>
-            <a:pPr lvl="0" indent="-342900" marL="342900">
-              <a:buAutoNum type="arabicPeriod"/>
-            </a:pPr>
-            <a:r>
-              <a:rPr/>
-              <a:t>Normality — data comes from normally distributed populations</a:t>
-            </a:r>
-          </a:p>
-          <a:p>
-            <a:pPr lvl="0" indent="-342900" marL="342900">
-              <a:buAutoNum type="arabicPeriod"/>
-            </a:pPr>
-            <a:r>
-              <a:rPr/>
-              <a:t>Equal variances (for two-sample tests)</a:t>
-            </a:r>
-          </a:p>
-          <a:p>
-            <a:pPr lvl="0" indent="-342900" marL="342900">
-              <a:buAutoNum type="arabicPeriod"/>
-            </a:pPr>
-            <a:r>
-              <a:rPr/>
-              <a:t>Independence — observations are independent</a:t>
-            </a:r>
-          </a:p>
-          <a:p>
-            <a:pPr lvl="0" indent="-342900" marL="342900">
-              <a:buAutoNum type="arabicPeriod"/>
-            </a:pPr>
-            <a:r>
-              <a:rPr/>
-              <a:t>No outliers — extreme values can influence results</a:t>
-            </a:r>
-          </a:p>
-          <a:p>
-            <a:pPr lvl="0" indent="0" marL="0">
-              <a:buNone/>
-            </a:pPr>
-            <a:r>
-              <a:rPr/>
-              <a:t>What can we do if our data violates these assumptions?</a:t>
-            </a:r>
-          </a:p>
-        </p:txBody>
-      </p:sp>
-      <p:sp>
-        <p:nvSpPr>
-          <p:cNvPr id="4" name="Content Placeholder 3"/>
-          <p:cNvSpPr>
-            <a:spLocks noGrp="1"/>
-          </p:cNvSpPr>
-          <p:nvPr>
-            <p:ph idx="2" sz="half"/>
-          </p:nvPr>
-        </p:nvSpPr>
-        <p:spPr/>
-        <p:txBody>
-          <a:bodyPr/>
-          <a:lstStyle/>
-          <a:p>
-            <a:pPr lvl="0" indent="0" marL="0">
-              <a:buNone/>
-            </a:pPr>
-            <a:r>
-              <a:rPr b="1"/>
-              <a:t>Alternatives when assumptions are violated:</a:t>
-            </a:r>
-          </a:p>
-          <a:p>
-            <a:pPr lvl="0"/>
-            <a:r>
-              <a:rPr/>
-              <a:t>Data transformation (log, square root, etc.)</a:t>
-            </a:r>
-          </a:p>
-          <a:p>
-            <a:pPr lvl="0"/>
-            <a:r>
-              <a:rPr/>
-              <a:t>Non-parametric tests</a:t>
-            </a:r>
-          </a:p>
-          <a:p>
-            <a:pPr lvl="0"/>
-            <a:r>
-              <a:rPr/>
-              <a:t>Robust statistical methods</a:t>
+              <a:t>Part 7 · Assumptions and Wrap-Up</a:t>
             </a:r>
           </a:p>
         </p:txBody>
@@ -12869,6 +13406,177 @@
             </a:pPr>
             <a:r>
               <a:rPr/>
+              <a:t>Assumptions of Parametric Tests</a:t>
+            </a:r>
+          </a:p>
+        </p:txBody>
+      </p:sp>
+      <p:sp>
+        <p:nvSpPr>
+          <p:cNvPr id="3" name="Content Placeholder 2"/>
+          <p:cNvSpPr>
+            <a:spLocks noGrp="1"/>
+          </p:cNvSpPr>
+          <p:nvPr>
+            <p:ph idx="1" sz="half"/>
+          </p:nvPr>
+        </p:nvSpPr>
+        <p:spPr/>
+        <p:txBody>
+          <a:bodyPr/>
+          <a:lstStyle/>
+          <a:p>
+            <a:pPr lvl="0" indent="0" marL="0">
+              <a:buNone/>
+            </a:pPr>
+            <a:r>
+              <a:rPr b="1"/>
+              <a:t>Common assumptions for t-tests:</a:t>
+            </a:r>
+          </a:p>
+          <a:p>
+            <a:pPr lvl="0" indent="-342900" marL="342900">
+              <a:buAutoNum type="arabicPeriod"/>
+            </a:pPr>
+            <a:r>
+              <a:rPr/>
+              <a:t>Normality — data comes from normally distributed populations</a:t>
+            </a:r>
+          </a:p>
+          <a:p>
+            <a:pPr lvl="0" indent="-342900" marL="342900">
+              <a:buAutoNum type="arabicPeriod"/>
+            </a:pPr>
+            <a:r>
+              <a:rPr/>
+              <a:t>Equal variances (for two-sample tests)</a:t>
+            </a:r>
+          </a:p>
+          <a:p>
+            <a:pPr lvl="0" indent="-342900" marL="342900">
+              <a:buAutoNum type="arabicPeriod"/>
+            </a:pPr>
+            <a:r>
+              <a:rPr/>
+              <a:t>Independence — observations are independent</a:t>
+            </a:r>
+          </a:p>
+          <a:p>
+            <a:pPr lvl="0" indent="-342900" marL="342900">
+              <a:buAutoNum type="arabicPeriod"/>
+            </a:pPr>
+            <a:r>
+              <a:rPr/>
+              <a:t>No outliers — extreme values can influence results</a:t>
+            </a:r>
+          </a:p>
+          <a:p>
+            <a:pPr lvl="0" indent="0" marL="0">
+              <a:buNone/>
+            </a:pPr>
+            <a:r>
+              <a:rPr/>
+              <a:t>What can we do if our data violates these assumptions?</a:t>
+            </a:r>
+          </a:p>
+        </p:txBody>
+      </p:sp>
+      <p:sp>
+        <p:nvSpPr>
+          <p:cNvPr id="4" name="Content Placeholder 3"/>
+          <p:cNvSpPr>
+            <a:spLocks noGrp="1"/>
+          </p:cNvSpPr>
+          <p:nvPr>
+            <p:ph idx="2" sz="half"/>
+          </p:nvPr>
+        </p:nvSpPr>
+        <p:spPr/>
+        <p:txBody>
+          <a:bodyPr/>
+          <a:lstStyle/>
+          <a:p>
+            <a:pPr lvl="0" indent="0" marL="0">
+              <a:buNone/>
+            </a:pPr>
+            <a:r>
+              <a:rPr b="1"/>
+              <a:t>Alternatives when assumptions are violated:</a:t>
+            </a:r>
+          </a:p>
+          <a:p>
+            <a:pPr lvl="0"/>
+            <a:r>
+              <a:rPr/>
+              <a:t>Data transformation (log, square root, etc.)</a:t>
+            </a:r>
+          </a:p>
+          <a:p>
+            <a:pPr lvl="0"/>
+            <a:r>
+              <a:rPr/>
+              <a:t>Non-parametric tests</a:t>
+            </a:r>
+          </a:p>
+          <a:p>
+            <a:pPr lvl="0"/>
+            <a:r>
+              <a:rPr/>
+              <a:t>Robust statistical methods</a:t>
+            </a:r>
+          </a:p>
+        </p:txBody>
+      </p:sp>
+    </p:spTree>
+  </p:cSld>
+</p:sld>
+</file>
+
+<file path=ppt/slides/slide47.xml><?xml version="1.0" encoding="utf-8"?>
+<p:sld xmlns:a="http://schemas.openxmlformats.org/drawingml/2006/main" xmlns:r="http://schemas.openxmlformats.org/officeDocument/2006/relationships" xmlns:p="http://schemas.openxmlformats.org/presentationml/2006/main">
+  <p:cSld>
+    <p:spTree>
+      <p:nvGrpSpPr>
+        <p:cNvPr id="1" name=""/>
+        <p:cNvGrpSpPr/>
+        <p:nvPr/>
+      </p:nvGrpSpPr>
+      <p:grpSpPr>
+        <a:xfrm>
+          <a:off x="0" y="0"/>
+          <a:ext cx="0" cy="0"/>
+          <a:chOff x="0" y="0"/>
+          <a:chExt cx="0" cy="0"/>
+        </a:xfrm>
+      </p:grpSpPr>
+      <p:sp>
+        <p:nvSpPr>
+          <p:cNvPr id="2" name="Title 1"/>
+          <p:cNvSpPr>
+            <a:spLocks noGrp="1"/>
+          </p:cNvSpPr>
+          <p:nvPr>
+            <p:ph type="title"/>
+          </p:nvPr>
+        </p:nvSpPr>
+        <p:spPr>
+          <a:xfrm>
+            <a:off x="0" y="0"/>
+            <a:ext cx="9144000" cy="602780"/>
+          </a:xfrm>
+          <a:solidFill>
+            <a:srgbClr val="70121D"/>
+          </a:solidFill>
+        </p:spPr>
+        <p:txBody>
+          <a:bodyPr/>
+          <a:lstStyle/>
+          <a:p>
+            <a:pPr lvl="0" indent="0" marL="0">
+              <a:buNone/>
+            </a:pPr>
+            <a:r>
+              <a:rPr/>
               <a:t>Summary and Conclusions</a:t>
             </a:r>
           </a:p>
@@ -13252,7 +13960,43 @@
                 </a:solidFill>
                 <a:latin typeface="Courier"/>
               </a:rPr>
-              <a:t>))</a:t>
+              <a:t>), </a:t>
+            </a:r>
+            <a:r>
+              <a:rPr>
+                <a:solidFill>
+                  <a:srgbClr val="657422"/>
+                </a:solidFill>
+                <a:latin typeface="Courier"/>
+              </a:rPr>
+              <a:t>.groups =</a:t>
+            </a:r>
+            <a:r>
+              <a:rPr>
+                <a:solidFill>
+                  <a:srgbClr val="003B4F"/>
+                </a:solidFill>
+                <a:latin typeface="Courier"/>
+              </a:rPr>
+              <a:t> </a:t>
+            </a:r>
+            <a:r>
+              <a:rPr>
+                <a:solidFill>
+                  <a:srgbClr val="20794D"/>
+                </a:solidFill>
+                <a:latin typeface="Courier"/>
+              </a:rPr>
+              <a:t>"drop"</a:t>
+            </a:r>
+            <a:r>
+              <a:rPr>
+                <a:solidFill>
+                  <a:srgbClr val="003B4F"/>
+                </a:solidFill>
+                <a:latin typeface="Courier"/>
+              </a:rPr>
+              <a:t>)</a:t>
             </a:r>
             <a:br/>
             <a:br/>
@@ -13409,7 +14153,43 @@
                 </a:solidFill>
                 <a:latin typeface="Courier"/>
               </a:rPr>
-              <a:t>))</a:t>
+              <a:t>), </a:t>
+            </a:r>
+            <a:r>
+              <a:rPr>
+                <a:solidFill>
+                  <a:srgbClr val="657422"/>
+                </a:solidFill>
+                <a:latin typeface="Courier"/>
+              </a:rPr>
+              <a:t>.groups =</a:t>
+            </a:r>
+            <a:r>
+              <a:rPr>
+                <a:solidFill>
+                  <a:srgbClr val="003B4F"/>
+                </a:solidFill>
+                <a:latin typeface="Courier"/>
+              </a:rPr>
+              <a:t> </a:t>
+            </a:r>
+            <a:r>
+              <a:rPr>
+                <a:solidFill>
+                  <a:srgbClr val="20794D"/>
+                </a:solidFill>
+                <a:latin typeface="Courier"/>
+              </a:rPr>
+              <a:t>"drop"</a:t>
+            </a:r>
+            <a:r>
+              <a:rPr>
+                <a:solidFill>
+                  <a:srgbClr val="003B4F"/>
+                </a:solidFill>
+                <a:latin typeface="Courier"/>
+              </a:rPr>
+              <a:t>)</a:t>
             </a:r>
             <a:br/>
             <a:br/>
